--- a/docs/demo/woodland.pptx
+++ b/docs/demo/woodland.pptx
@@ -68,7 +68,7 @@
         <p:txBody>
           <a:bodyPr/>
           <a:p>
-            <a:fld id="{921D00A1-9734-4556-8545-F904D6F57486}" type="slidenum">
+            <a:fld id="{19973992-EAED-45FF-BDDD-45B3867EFC14}" type="slidenum">
               <a:t>&lt;#&gt;</a:t>
             </a:fld>
           </a:p>
@@ -238,7 +238,7 @@
         <p:txBody>
           <a:bodyPr/>
           <a:p>
-            <a:fld id="{181045FD-B0B1-4B72-A3C0-284C26264F03}" type="slidenum">
+            <a:fld id="{CFD9E747-5E5A-4438-947C-D3E69C42BE56}" type="slidenum">
               <a:t>&lt;#&gt;</a:t>
             </a:fld>
           </a:p>
@@ -920,7 +920,7 @@
             <a:pPr indent="0" algn="r">
               <a:buNone/>
             </a:pPr>
-            <a:fld id="{1D022944-1620-40C0-8392-83161225719B}" type="slidenum">
+            <a:fld id="{B7B4C6D0-94C8-42F7-9ACB-6636E323A20E}" type="slidenum">
               <a:rPr lang="en-US" sz="1400" b="0" u="none" strike="noStrike">
                 <a:solidFill>
                   <a:srgbClr val="000000"/>

--- a/docs/demo/woodland.pptx
+++ b/docs/demo/woodland.pptx
@@ -68,7 +68,7 @@
         <p:txBody>
           <a:bodyPr/>
           <a:p>
-            <a:fld id="{19973992-EAED-45FF-BDDD-45B3867EFC14}" type="slidenum">
+            <a:fld id="{DC5BCFC9-14D4-45BD-8D81-2AC0FDF2C1D4}" type="slidenum">
               <a:t>&lt;#&gt;</a:t>
             </a:fld>
           </a:p>
@@ -238,7 +238,7 @@
         <p:txBody>
           <a:bodyPr/>
           <a:p>
-            <a:fld id="{CFD9E747-5E5A-4438-947C-D3E69C42BE56}" type="slidenum">
+            <a:fld id="{653D022E-372F-4C2C-9F96-2E5AC1B60E46}" type="slidenum">
               <a:t>&lt;#&gt;</a:t>
             </a:fld>
           </a:p>
@@ -920,7 +920,7 @@
             <a:pPr indent="0" algn="r">
               <a:buNone/>
             </a:pPr>
-            <a:fld id="{B7B4C6D0-94C8-42F7-9ACB-6636E323A20E}" type="slidenum">
+            <a:fld id="{B62E31BA-98A3-47D9-B06C-6F94FC1A4B47}" type="slidenum">
               <a:rPr lang="en-US" sz="1400" b="0" u="none" strike="noStrike">
                 <a:solidFill>
                   <a:srgbClr val="000000"/>

--- a/docs/demo/woodland.pptx
+++ b/docs/demo/woodland.pptx
@@ -4,17 +4,860 @@
   <p:sldMasterIdLst>
     <p:sldMasterId id="2147483648" r:id="rId2"/>
   </p:sldMasterIdLst>
+  <p:notesMasterIdLst>
+    <p:notesMasterId r:id="rId3"/>
+  </p:notesMasterIdLst>
   <p:sldIdLst>
-    <p:sldId id="256" r:id="rId3"/>
-    <p:sldId id="257" r:id="rId4"/>
-    <p:sldId id="258" r:id="rId5"/>
-    <p:sldId id="259" r:id="rId6"/>
-    <p:sldId id="260" r:id="rId7"/>
-    <p:sldId id="261" r:id="rId8"/>
+    <p:sldId id="256" r:id="rId4"/>
+    <p:sldId id="257" r:id="rId5"/>
+    <p:sldId id="258" r:id="rId6"/>
+    <p:sldId id="259" r:id="rId7"/>
+    <p:sldId id="260" r:id="rId8"/>
+    <p:sldId id="261" r:id="rId9"/>
   </p:sldIdLst>
   <p:sldSz cx="10080625" cy="5670550"/>
   <p:notesSz cx="7772400" cy="10058400"/>
 </p:presentation>
+</file>
+
+<file path=ppt/notesMasters/notesMaster1.xml><?xml version="1.0" encoding="utf-8"?>
+<p:notesMaster xmlns:a="http://schemas.openxmlformats.org/drawingml/2006/main" xmlns:p="http://schemas.openxmlformats.org/presentationml/2006/main" xmlns:r="http://schemas.openxmlformats.org/officeDocument/2006/relationships" xmlns:p14="http://schemas.microsoft.com/office/powerpoint/2010/main" xmlns:p15="http://schemas.microsoft.com/office/powerpoint/2012/main" xmlns:mc="http://schemas.openxmlformats.org/markup-compatibility/2006">
+  <p:cSld>
+    <p:spTree>
+      <p:nvGrpSpPr>
+        <p:cNvPr id="1" name=""/>
+        <p:cNvGrpSpPr/>
+        <p:nvPr/>
+      </p:nvGrpSpPr>
+      <p:grpSpPr>
+        <a:xfrm>
+          <a:off x="0" y="0"/>
+          <a:ext cx="0" cy="0"/>
+          <a:chOff x="0" y="0"/>
+          <a:chExt cx="0" cy="0"/>
+        </a:xfrm>
+      </p:grpSpPr>
+      <p:sp>
+        <p:nvSpPr>
+          <p:cNvPr id="9" name="PlaceHolder 1"/>
+          <p:cNvSpPr>
+            <a:spLocks noGrp="1"/>
+          </p:cNvSpPr>
+          <p:nvPr>
+            <p:ph type="sldImg"/>
+          </p:nvPr>
+        </p:nvSpPr>
+        <p:spPr>
+          <a:xfrm>
+            <a:off x="533520" y="764280"/>
+            <a:ext cx="6704640" cy="3771360"/>
+          </a:xfrm>
+          <a:prstGeom prst="rect">
+            <a:avLst/>
+          </a:prstGeom>
+          <a:noFill/>
+          <a:ln w="0">
+            <a:noFill/>
+          </a:ln>
+        </p:spPr>
+        <p:txBody>
+          <a:bodyPr lIns="0" tIns="0" rIns="0" bIns="0" anchor="ctr">
+            <a:noAutofit/>
+          </a:bodyPr>
+          <a:p>
+            <a:pPr algn="ctr"/>
+            <a:r>
+              <a:rPr lang="en-US" sz="4400" b="0" u="none" strike="noStrike">
+                <a:solidFill>
+                  <a:srgbClr val="000000"/>
+                </a:solidFill>
+                <a:effectLst/>
+                <a:uFillTx/>
+                <a:latin typeface="Arial"/>
+              </a:rPr>
+              <a:t>Click to move the slide</a:t>
+            </a:r>
+            <a:endParaRPr lang="en-US" sz="4400" b="0" u="none" strike="noStrike">
+              <a:solidFill>
+                <a:srgbClr val="000000"/>
+              </a:solidFill>
+              <a:effectLst/>
+              <a:uFillTx/>
+              <a:latin typeface="Arial"/>
+            </a:endParaRPr>
+          </a:p>
+        </p:txBody>
+      </p:sp>
+      <p:sp>
+        <p:nvSpPr>
+          <p:cNvPr id="10" name="PlaceHolder 2"/>
+          <p:cNvSpPr>
+            <a:spLocks noGrp="1"/>
+          </p:cNvSpPr>
+          <p:nvPr>
+            <p:ph type="body"/>
+          </p:nvPr>
+        </p:nvSpPr>
+        <p:spPr>
+          <a:xfrm>
+            <a:off x="777240" y="4777560"/>
+            <a:ext cx="6217560" cy="4525920"/>
+          </a:xfrm>
+          <a:prstGeom prst="rect">
+            <a:avLst/>
+          </a:prstGeom>
+          <a:noFill/>
+          <a:ln w="0">
+            <a:noFill/>
+          </a:ln>
+        </p:spPr>
+        <p:txBody>
+          <a:bodyPr lIns="0" tIns="0" rIns="0" bIns="0" anchor="t">
+            <a:noAutofit/>
+          </a:bodyPr>
+          <a:p>
+            <a:pPr indent="0" algn="l">
+              <a:buNone/>
+            </a:pPr>
+            <a:r>
+              <a:rPr lang="en-US" sz="2000" b="0" u="none" strike="noStrike">
+                <a:solidFill>
+                  <a:srgbClr val="000000"/>
+                </a:solidFill>
+                <a:effectLst/>
+                <a:uFillTx/>
+                <a:latin typeface="Arial"/>
+              </a:rPr>
+              <a:t>Click to edit the notes format</a:t>
+            </a:r>
+            <a:endParaRPr lang="en-US" sz="2000" b="0" u="none" strike="noStrike">
+              <a:solidFill>
+                <a:srgbClr val="000000"/>
+              </a:solidFill>
+              <a:effectLst/>
+              <a:uFillTx/>
+              <a:latin typeface="Arial"/>
+            </a:endParaRPr>
+          </a:p>
+        </p:txBody>
+      </p:sp>
+      <p:sp>
+        <p:nvSpPr>
+          <p:cNvPr id="11" name="PlaceHolder 3"/>
+          <p:cNvSpPr>
+            <a:spLocks noGrp="1"/>
+          </p:cNvSpPr>
+          <p:nvPr>
+            <p:ph type="hdr"/>
+          </p:nvPr>
+        </p:nvSpPr>
+        <p:spPr>
+          <a:xfrm>
+            <a:off x="0" y="0"/>
+            <a:ext cx="3372840" cy="502560"/>
+          </a:xfrm>
+          <a:prstGeom prst="rect">
+            <a:avLst/>
+          </a:prstGeom>
+          <a:noFill/>
+          <a:ln w="0">
+            <a:noFill/>
+          </a:ln>
+        </p:spPr>
+        <p:txBody>
+          <a:bodyPr lIns="0" tIns="0" rIns="0" bIns="0" anchor="t">
+            <a:noAutofit/>
+          </a:bodyPr>
+          <a:p>
+            <a:pPr indent="0" algn="l">
+              <a:buNone/>
+            </a:pPr>
+            <a:r>
+              <a:rPr lang="en-US" sz="1400" b="0" u="none" strike="noStrike">
+                <a:solidFill>
+                  <a:srgbClr val="000000"/>
+                </a:solidFill>
+                <a:effectLst/>
+                <a:uFillTx/>
+                <a:latin typeface="Times New Roman"/>
+              </a:rPr>
+              <a:t>&lt;header&gt;</a:t>
+            </a:r>
+            <a:endParaRPr lang="en-US" sz="1400" b="0" u="none" strike="noStrike">
+              <a:solidFill>
+                <a:srgbClr val="000000"/>
+              </a:solidFill>
+              <a:effectLst/>
+              <a:uFillTx/>
+              <a:latin typeface="Times New Roman"/>
+            </a:endParaRPr>
+          </a:p>
+        </p:txBody>
+      </p:sp>
+      <p:sp>
+        <p:nvSpPr>
+          <p:cNvPr id="12" name="PlaceHolder 4"/>
+          <p:cNvSpPr>
+            <a:spLocks noGrp="1"/>
+          </p:cNvSpPr>
+          <p:nvPr>
+            <p:ph type="dt" idx="4"/>
+          </p:nvPr>
+        </p:nvSpPr>
+        <p:spPr>
+          <a:xfrm>
+            <a:off x="4399200" y="0"/>
+            <a:ext cx="3372840" cy="502560"/>
+          </a:xfrm>
+          <a:prstGeom prst="rect">
+            <a:avLst/>
+          </a:prstGeom>
+          <a:noFill/>
+          <a:ln w="0">
+            <a:noFill/>
+          </a:ln>
+        </p:spPr>
+        <p:txBody>
+          <a:bodyPr lIns="0" tIns="0" rIns="0" bIns="0" anchor="t">
+            <a:noAutofit/>
+          </a:bodyPr>
+          <a:lstStyle>
+            <a:lvl1pPr indent="0" algn="r">
+              <a:buNone/>
+              <a:defRPr lang="en-US" sz="1400" b="0" u="none" strike="noStrike">
+                <a:solidFill>
+                  <a:srgbClr val="000000"/>
+                </a:solidFill>
+                <a:effectLst/>
+                <a:uFillTx/>
+                <a:latin typeface="Times New Roman"/>
+              </a:defRPr>
+            </a:lvl1pPr>
+          </a:lstStyle>
+          <a:p>
+            <a:pPr indent="0" algn="r">
+              <a:buNone/>
+            </a:pPr>
+            <a:r>
+              <a:rPr lang="en-US" sz="1400" b="0" u="none" strike="noStrike">
+                <a:solidFill>
+                  <a:srgbClr val="000000"/>
+                </a:solidFill>
+                <a:effectLst/>
+                <a:uFillTx/>
+                <a:latin typeface="Times New Roman"/>
+              </a:rPr>
+              <a:t>&lt;date/time&gt;</a:t>
+            </a:r>
+            <a:endParaRPr lang="en-US" sz="1400" b="0" u="none" strike="noStrike">
+              <a:solidFill>
+                <a:srgbClr val="000000"/>
+              </a:solidFill>
+              <a:effectLst/>
+              <a:uFillTx/>
+              <a:latin typeface="Times New Roman"/>
+            </a:endParaRPr>
+          </a:p>
+        </p:txBody>
+      </p:sp>
+      <p:sp>
+        <p:nvSpPr>
+          <p:cNvPr id="13" name="PlaceHolder 5"/>
+          <p:cNvSpPr>
+            <a:spLocks noGrp="1"/>
+          </p:cNvSpPr>
+          <p:nvPr>
+            <p:ph type="ftr" idx="5"/>
+          </p:nvPr>
+        </p:nvSpPr>
+        <p:spPr>
+          <a:xfrm>
+            <a:off x="0" y="9555480"/>
+            <a:ext cx="3372840" cy="502560"/>
+          </a:xfrm>
+          <a:prstGeom prst="rect">
+            <a:avLst/>
+          </a:prstGeom>
+          <a:noFill/>
+          <a:ln w="0">
+            <a:noFill/>
+          </a:ln>
+        </p:spPr>
+        <p:txBody>
+          <a:bodyPr lIns="0" tIns="0" rIns="0" bIns="0" anchor="b">
+            <a:noAutofit/>
+          </a:bodyPr>
+          <a:lstStyle>
+            <a:lvl1pPr indent="0" algn="l">
+              <a:buNone/>
+              <a:defRPr lang="en-US" sz="1400" b="0" u="none" strike="noStrike">
+                <a:solidFill>
+                  <a:srgbClr val="000000"/>
+                </a:solidFill>
+                <a:effectLst/>
+                <a:uFillTx/>
+                <a:latin typeface="Times New Roman"/>
+              </a:defRPr>
+            </a:lvl1pPr>
+          </a:lstStyle>
+          <a:p>
+            <a:pPr indent="0" algn="l">
+              <a:buNone/>
+            </a:pPr>
+            <a:r>
+              <a:rPr lang="en-US" sz="1400" b="0" u="none" strike="noStrike">
+                <a:solidFill>
+                  <a:srgbClr val="000000"/>
+                </a:solidFill>
+                <a:effectLst/>
+                <a:uFillTx/>
+                <a:latin typeface="Times New Roman"/>
+              </a:rPr>
+              <a:t>&lt;footer&gt;</a:t>
+            </a:r>
+            <a:endParaRPr lang="en-US" sz="1400" b="0" u="none" strike="noStrike">
+              <a:solidFill>
+                <a:srgbClr val="000000"/>
+              </a:solidFill>
+              <a:effectLst/>
+              <a:uFillTx/>
+              <a:latin typeface="Times New Roman"/>
+            </a:endParaRPr>
+          </a:p>
+        </p:txBody>
+      </p:sp>
+      <p:sp>
+        <p:nvSpPr>
+          <p:cNvPr id="14" name="PlaceHolder 6"/>
+          <p:cNvSpPr>
+            <a:spLocks noGrp="1"/>
+          </p:cNvSpPr>
+          <p:nvPr>
+            <p:ph type="sldNum" idx="6"/>
+          </p:nvPr>
+        </p:nvSpPr>
+        <p:spPr>
+          <a:xfrm>
+            <a:off x="4399200" y="9555480"/>
+            <a:ext cx="3372840" cy="502560"/>
+          </a:xfrm>
+          <a:prstGeom prst="rect">
+            <a:avLst/>
+          </a:prstGeom>
+          <a:noFill/>
+          <a:ln w="0">
+            <a:noFill/>
+          </a:ln>
+        </p:spPr>
+        <p:txBody>
+          <a:bodyPr lIns="0" tIns="0" rIns="0" bIns="0" anchor="b">
+            <a:noAutofit/>
+          </a:bodyPr>
+          <a:lstStyle>
+            <a:lvl1pPr indent="0" algn="r">
+              <a:buNone/>
+              <a:defRPr lang="en-US" sz="1400" b="0" u="none" strike="noStrike">
+                <a:solidFill>
+                  <a:srgbClr val="000000"/>
+                </a:solidFill>
+                <a:effectLst/>
+                <a:uFillTx/>
+                <a:latin typeface="Times New Roman"/>
+              </a:defRPr>
+            </a:lvl1pPr>
+          </a:lstStyle>
+          <a:p>
+            <a:pPr indent="0" algn="r">
+              <a:buNone/>
+            </a:pPr>
+            <a:fld id="{7BB4C893-1A78-4EB5-973B-CBF509A88E7B}" type="slidenum">
+              <a:rPr lang="en-US" sz="1400" b="0" u="none" strike="noStrike">
+                <a:solidFill>
+                  <a:srgbClr val="000000"/>
+                </a:solidFill>
+                <a:effectLst/>
+                <a:uFillTx/>
+                <a:latin typeface="Times New Roman"/>
+              </a:rPr>
+              <a:t>&lt;number&gt;</a:t>
+            </a:fld>
+            <a:endParaRPr lang="en-US" sz="1400" b="0" u="none" strike="noStrike">
+              <a:solidFill>
+                <a:srgbClr val="000000"/>
+              </a:solidFill>
+              <a:effectLst/>
+              <a:uFillTx/>
+              <a:latin typeface="Times New Roman"/>
+            </a:endParaRPr>
+          </a:p>
+        </p:txBody>
+      </p:sp>
+    </p:spTree>
+  </p:cSld>
+  <p:clrMap bg1="lt1" bg2="lt2" tx1="dk1" tx2="dk2" accent1="accent1" accent2="accent2" accent3="accent3" accent4="accent4" accent5="accent5" accent6="accent6" hlink="hlink" folHlink="folHlink"/>
+</p:notesMaster>
+</file>
+
+<file path=ppt/notesSlides/notesSlide1.xml><?xml version="1.0" encoding="utf-8"?>
+<p:notes xmlns:a="http://schemas.openxmlformats.org/drawingml/2006/main" xmlns:p="http://schemas.openxmlformats.org/presentationml/2006/main" xmlns:r="http://schemas.openxmlformats.org/officeDocument/2006/relationships" xmlns:p14="http://schemas.microsoft.com/office/powerpoint/2010/main" xmlns:p15="http://schemas.microsoft.com/office/powerpoint/2012/main" xmlns:mc="http://schemas.openxmlformats.org/markup-compatibility/2006">
+  <p:cSld>
+    <p:spTree>
+      <p:nvGrpSpPr>
+        <p:cNvPr id="1" name=""/>
+        <p:cNvGrpSpPr/>
+        <p:nvPr/>
+      </p:nvGrpSpPr>
+      <p:grpSpPr>
+        <a:xfrm>
+          <a:off x="0" y="0"/>
+          <a:ext cx="0" cy="0"/>
+          <a:chOff x="0" y="0"/>
+          <a:chExt cx="0" cy="0"/>
+        </a:xfrm>
+      </p:grpSpPr>
+      <p:sp>
+        <p:nvSpPr>
+          <p:cNvPr id="27" name=""/>
+          <p:cNvSpPr txBox="1"/>
+          <p:nvPr/>
+        </p:nvSpPr>
+        <p:spPr>
+          <a:xfrm>
+            <a:off x="914400" y="914400"/>
+            <a:ext cx="5486400" cy="3657600"/>
+          </a:xfrm>
+          <a:prstGeom prst="rect">
+            <a:avLst/>
+          </a:prstGeom>
+          <a:solidFill>
+            <a:schemeClr val="accent1"/>
+          </a:solidFill>
+          <a:ln w="38160">
+            <a:solidFill>
+              <a:schemeClr val="accent1">
+                <a:lumMod val="75000"/>
+                <a:lumOff val="0"/>
+              </a:schemeClr>
+            </a:solidFill>
+            <a:round/>
+          </a:ln>
+        </p:spPr>
+        <p:txBody>
+          <a:bodyPr lIns="90000" tIns="45000" rIns="90000" bIns="45000" anchor="t">
+            <a:spAutoFit/>
+          </a:bodyPr>
+          <a:p>
+            <a:pPr/>
+            <a:r>
+              <a:rPr lang="en-US" sz="1800" b="0" u="none" strike="noStrike">
+                <a:solidFill>
+                  <a:srgbClr val="FFFFFF"/>
+                </a:solidFill>
+                <a:effectLst/>
+                <a:uFillTx/>
+                <a:latin typeface="Arial"/>
+              </a:rPr>
+              <a:t>Thank them for coming. Keep this to twenty minutes.</a:t>
+            </a:r>
+            <a:endParaRPr lang="en-US" sz="1800" b="0" u="none" strike="noStrike">
+              <a:solidFill>
+                <a:srgbClr val="FFFFFF"/>
+              </a:solidFill>
+              <a:effectLst/>
+              <a:uFillTx/>
+              <a:latin typeface="Arial"/>
+            </a:endParaRPr>
+          </a:p>
+        </p:txBody>
+      </p:sp>
+    </p:spTree>
+  </p:cSld>
+</p:notes>
+</file>
+
+<file path=ppt/notesSlides/notesSlide2.xml><?xml version="1.0" encoding="utf-8"?>
+<p:notes xmlns:a="http://schemas.openxmlformats.org/drawingml/2006/main" xmlns:p="http://schemas.openxmlformats.org/presentationml/2006/main" xmlns:r="http://schemas.openxmlformats.org/officeDocument/2006/relationships" xmlns:p14="http://schemas.microsoft.com/office/powerpoint/2010/main" xmlns:p15="http://schemas.microsoft.com/office/powerpoint/2012/main" xmlns:mc="http://schemas.openxmlformats.org/markup-compatibility/2006">
+  <p:cSld>
+    <p:spTree>
+      <p:nvGrpSpPr>
+        <p:cNvPr id="1" name=""/>
+        <p:cNvGrpSpPr/>
+        <p:nvPr/>
+      </p:nvGrpSpPr>
+      <p:grpSpPr>
+        <a:xfrm>
+          <a:off x="0" y="0"/>
+          <a:ext cx="0" cy="0"/>
+          <a:chOff x="0" y="0"/>
+          <a:chExt cx="0" cy="0"/>
+        </a:xfrm>
+      </p:grpSpPr>
+      <p:sp>
+        <p:nvSpPr>
+          <p:cNvPr id="28" name=""/>
+          <p:cNvSpPr txBox="1"/>
+          <p:nvPr/>
+        </p:nvSpPr>
+        <p:spPr>
+          <a:xfrm>
+            <a:off x="914400" y="914400"/>
+            <a:ext cx="5486400" cy="3657600"/>
+          </a:xfrm>
+          <a:prstGeom prst="rect">
+            <a:avLst/>
+          </a:prstGeom>
+          <a:solidFill>
+            <a:schemeClr val="accent1"/>
+          </a:solidFill>
+          <a:ln w="38160">
+            <a:solidFill>
+              <a:schemeClr val="accent1">
+                <a:lumMod val="75000"/>
+                <a:lumOff val="0"/>
+              </a:schemeClr>
+            </a:solidFill>
+            <a:round/>
+          </a:ln>
+        </p:spPr>
+        <p:txBody>
+          <a:bodyPr lIns="90000" tIns="45000" rIns="90000" bIns="45000" anchor="t">
+            <a:spAutoFit/>
+          </a:bodyPr>
+          <a:p>
+            <a:pPr/>
+            <a:r>
+              <a:rPr lang="en-US" sz="1800" b="0" u="none" strike="noStrike">
+                <a:solidFill>
+                  <a:srgbClr val="FFFFFF"/>
+                </a:solidFill>
+                <a:effectLst/>
+                <a:uFillTx/>
+                <a:latin typeface="Arial"/>
+              </a:rPr>
+              <a:t>The vacancy was in March. Do not volunteer that unless asked.</a:t>
+            </a:r>
+            <a:endParaRPr lang="en-US" sz="1800" b="0" u="none" strike="noStrike">
+              <a:solidFill>
+                <a:srgbClr val="FFFFFF"/>
+              </a:solidFill>
+              <a:effectLst/>
+              <a:uFillTx/>
+              <a:latin typeface="Arial"/>
+            </a:endParaRPr>
+          </a:p>
+        </p:txBody>
+      </p:sp>
+    </p:spTree>
+  </p:cSld>
+</p:notes>
+</file>
+
+<file path=ppt/notesSlides/notesSlide3.xml><?xml version="1.0" encoding="utf-8"?>
+<p:notes xmlns:a="http://schemas.openxmlformats.org/drawingml/2006/main" xmlns:p="http://schemas.openxmlformats.org/presentationml/2006/main" xmlns:r="http://schemas.openxmlformats.org/officeDocument/2006/relationships" xmlns:p14="http://schemas.microsoft.com/office/powerpoint/2010/main" xmlns:p15="http://schemas.microsoft.com/office/powerpoint/2012/main" xmlns:mc="http://schemas.openxmlformats.org/markup-compatibility/2006">
+  <p:cSld>
+    <p:spTree>
+      <p:nvGrpSpPr>
+        <p:cNvPr id="1" name=""/>
+        <p:cNvGrpSpPr/>
+        <p:nvPr/>
+      </p:nvGrpSpPr>
+      <p:grpSpPr>
+        <a:xfrm>
+          <a:off x="0" y="0"/>
+          <a:ext cx="0" cy="0"/>
+          <a:chOff x="0" y="0"/>
+          <a:chExt cx="0" cy="0"/>
+        </a:xfrm>
+      </p:grpSpPr>
+      <p:sp>
+        <p:nvSpPr>
+          <p:cNvPr id="29" name=""/>
+          <p:cNvSpPr txBox="1"/>
+          <p:nvPr/>
+        </p:nvSpPr>
+        <p:spPr>
+          <a:xfrm>
+            <a:off x="914400" y="914400"/>
+            <a:ext cx="5486400" cy="3657600"/>
+          </a:xfrm>
+          <a:prstGeom prst="rect">
+            <a:avLst/>
+          </a:prstGeom>
+          <a:solidFill>
+            <a:schemeClr val="accent1"/>
+          </a:solidFill>
+          <a:ln w="38160">
+            <a:solidFill>
+              <a:schemeClr val="accent1">
+                <a:lumMod val="75000"/>
+                <a:lumOff val="0"/>
+              </a:schemeClr>
+            </a:solidFill>
+            <a:round/>
+          </a:ln>
+        </p:spPr>
+        <p:txBody>
+          <a:bodyPr lIns="90000" tIns="45000" rIns="90000" bIns="45000" anchor="t">
+            <a:spAutoFit/>
+          </a:bodyPr>
+          <a:p>
+            <a:pPr/>
+            <a:r>
+              <a:rPr lang="en-US" sz="1800" b="0" u="none" strike="noStrike">
+                <a:solidFill>
+                  <a:srgbClr val="FFFFFF"/>
+                </a:solidFill>
+                <a:effectLst/>
+                <a:uFillTx/>
+                <a:latin typeface="Arial"/>
+              </a:rPr>
+              <a:t>Six per cent is the headline. The board will ask how much of it is the one new tenant.</a:t>
+            </a:r>
+            <a:endParaRPr lang="en-US" sz="1800" b="0" u="none" strike="noStrike">
+              <a:solidFill>
+                <a:srgbClr val="FFFFFF"/>
+              </a:solidFill>
+              <a:effectLst/>
+              <a:uFillTx/>
+              <a:latin typeface="Arial"/>
+            </a:endParaRPr>
+          </a:p>
+        </p:txBody>
+      </p:sp>
+    </p:spTree>
+  </p:cSld>
+</p:notes>
+</file>
+
+<file path=ppt/notesSlides/notesSlide4.xml><?xml version="1.0" encoding="utf-8"?>
+<p:notes xmlns:a="http://schemas.openxmlformats.org/drawingml/2006/main" xmlns:p="http://schemas.openxmlformats.org/presentationml/2006/main" xmlns:r="http://schemas.openxmlformats.org/officeDocument/2006/relationships" xmlns:p14="http://schemas.microsoft.com/office/powerpoint/2010/main" xmlns:p15="http://schemas.microsoft.com/office/powerpoint/2012/main" xmlns:mc="http://schemas.openxmlformats.org/markup-compatibility/2006">
+  <p:cSld>
+    <p:spTree>
+      <p:nvGrpSpPr>
+        <p:cNvPr id="1" name=""/>
+        <p:cNvGrpSpPr/>
+        <p:nvPr/>
+      </p:nvGrpSpPr>
+      <p:grpSpPr>
+        <a:xfrm>
+          <a:off x="0" y="0"/>
+          <a:ext cx="0" cy="0"/>
+          <a:chOff x="0" y="0"/>
+          <a:chExt cx="0" cy="0"/>
+        </a:xfrm>
+      </p:grpSpPr>
+      <p:sp>
+        <p:nvSpPr>
+          <p:cNvPr id="30" name=""/>
+          <p:cNvSpPr txBox="1"/>
+          <p:nvPr/>
+        </p:nvSpPr>
+        <p:spPr>
+          <a:xfrm>
+            <a:off x="914400" y="914400"/>
+            <a:ext cx="5486400" cy="3657600"/>
+          </a:xfrm>
+          <a:prstGeom prst="rect">
+            <a:avLst/>
+          </a:prstGeom>
+          <a:solidFill>
+            <a:schemeClr val="accent1"/>
+          </a:solidFill>
+          <a:ln w="38160">
+            <a:solidFill>
+              <a:schemeClr val="accent1">
+                <a:lumMod val="75000"/>
+                <a:lumOff val="0"/>
+              </a:schemeClr>
+            </a:solidFill>
+            <a:round/>
+          </a:ln>
+        </p:spPr>
+        <p:txBody>
+          <a:bodyPr lIns="90000" tIns="45000" rIns="90000" bIns="45000" anchor="t">
+            <a:spAutoFit/>
+          </a:bodyPr>
+          <a:p>
+            <a:pPr/>
+            <a:r>
+              <a:rPr lang="en-US" sz="1800" b="0" u="none" strike="noStrike">
+                <a:solidFill>
+                  <a:srgbClr val="FFFFFF"/>
+                </a:solidFill>
+                <a:effectLst/>
+                <a:uFillTx/>
+                <a:latin typeface="Arial"/>
+              </a:rPr>
+              <a:t>Insurance is up eight per cent and will go up again at renewal.</a:t>
+            </a:r>
+            <a:endParaRPr lang="en-US" sz="1800" b="0" u="none" strike="noStrike">
+              <a:solidFill>
+                <a:srgbClr val="FFFFFF"/>
+              </a:solidFill>
+              <a:effectLst/>
+              <a:uFillTx/>
+              <a:latin typeface="Arial"/>
+            </a:endParaRPr>
+          </a:p>
+        </p:txBody>
+      </p:sp>
+    </p:spTree>
+  </p:cSld>
+</p:notes>
+</file>
+
+<file path=ppt/notesSlides/notesSlide5.xml><?xml version="1.0" encoding="utf-8"?>
+<p:notes xmlns:a="http://schemas.openxmlformats.org/drawingml/2006/main" xmlns:p="http://schemas.openxmlformats.org/presentationml/2006/main" xmlns:r="http://schemas.openxmlformats.org/officeDocument/2006/relationships" xmlns:p14="http://schemas.microsoft.com/office/powerpoint/2010/main" xmlns:p15="http://schemas.microsoft.com/office/powerpoint/2012/main" xmlns:mc="http://schemas.openxmlformats.org/markup-compatibility/2006">
+  <p:cSld>
+    <p:spTree>
+      <p:nvGrpSpPr>
+        <p:cNvPr id="1" name=""/>
+        <p:cNvGrpSpPr/>
+        <p:nvPr/>
+      </p:nvGrpSpPr>
+      <p:grpSpPr>
+        <a:xfrm>
+          <a:off x="0" y="0"/>
+          <a:ext cx="0" cy="0"/>
+          <a:chOff x="0" y="0"/>
+          <a:chExt cx="0" cy="0"/>
+        </a:xfrm>
+      </p:grpSpPr>
+      <p:sp>
+        <p:nvSpPr>
+          <p:cNvPr id="31" name=""/>
+          <p:cNvSpPr txBox="1"/>
+          <p:nvPr/>
+        </p:nvSpPr>
+        <p:spPr>
+          <a:xfrm>
+            <a:off x="914400" y="914400"/>
+            <a:ext cx="5486400" cy="3657600"/>
+          </a:xfrm>
+          <a:prstGeom prst="rect">
+            <a:avLst/>
+          </a:prstGeom>
+          <a:solidFill>
+            <a:schemeClr val="accent1"/>
+          </a:solidFill>
+          <a:ln w="38160">
+            <a:solidFill>
+              <a:schemeClr val="accent1">
+                <a:lumMod val="75000"/>
+                <a:lumOff val="0"/>
+              </a:schemeClr>
+            </a:solidFill>
+            <a:round/>
+          </a:ln>
+        </p:spPr>
+        <p:txBody>
+          <a:bodyPr lIns="90000" tIns="45000" rIns="90000" bIns="45000" anchor="t">
+            <a:spAutoFit/>
+          </a:bodyPr>
+          <a:p>
+            <a:pPr/>
+            <a:r>
+              <a:rPr lang="en-US" sz="1800" b="0" u="none" strike="noStrike">
+                <a:solidFill>
+                  <a:srgbClr val="FFFFFF"/>
+                </a:solidFill>
+                <a:effectLst/>
+                <a:uFillTx/>
+                <a:latin typeface="Arial"/>
+              </a:rPr>
+              <a:t>This is the one they will push on. The survey is booked, the money is there.</a:t>
+            </a:r>
+            <a:endParaRPr lang="en-US" sz="1800" b="0" u="none" strike="noStrike">
+              <a:solidFill>
+                <a:srgbClr val="FFFFFF"/>
+              </a:solidFill>
+              <a:effectLst/>
+              <a:uFillTx/>
+              <a:latin typeface="Arial"/>
+            </a:endParaRPr>
+          </a:p>
+        </p:txBody>
+      </p:sp>
+    </p:spTree>
+  </p:cSld>
+</p:notes>
+</file>
+
+<file path=ppt/notesSlides/notesSlide6.xml><?xml version="1.0" encoding="utf-8"?>
+<p:notes xmlns:a="http://schemas.openxmlformats.org/drawingml/2006/main" xmlns:p="http://schemas.openxmlformats.org/presentationml/2006/main" xmlns:r="http://schemas.openxmlformats.org/officeDocument/2006/relationships" xmlns:p14="http://schemas.microsoft.com/office/powerpoint/2010/main" xmlns:p15="http://schemas.microsoft.com/office/powerpoint/2012/main" xmlns:mc="http://schemas.openxmlformats.org/markup-compatibility/2006">
+  <p:cSld>
+    <p:spTree>
+      <p:nvGrpSpPr>
+        <p:cNvPr id="1" name=""/>
+        <p:cNvGrpSpPr/>
+        <p:nvPr/>
+      </p:nvGrpSpPr>
+      <p:grpSpPr>
+        <a:xfrm>
+          <a:off x="0" y="0"/>
+          <a:ext cx="0" cy="0"/>
+          <a:chOff x="0" y="0"/>
+          <a:chExt cx="0" cy="0"/>
+        </a:xfrm>
+      </p:grpSpPr>
+      <p:sp>
+        <p:nvSpPr>
+          <p:cNvPr id="32" name=""/>
+          <p:cNvSpPr txBox="1"/>
+          <p:nvPr/>
+        </p:nvSpPr>
+        <p:spPr>
+          <a:xfrm>
+            <a:off x="914400" y="914400"/>
+            <a:ext cx="5486400" cy="3657600"/>
+          </a:xfrm>
+          <a:prstGeom prst="rect">
+            <a:avLst/>
+          </a:prstGeom>
+          <a:solidFill>
+            <a:schemeClr val="accent1"/>
+          </a:solidFill>
+          <a:ln w="38160">
+            <a:solidFill>
+              <a:schemeClr val="accent1">
+                <a:lumMod val="75000"/>
+                <a:lumOff val="0"/>
+              </a:schemeClr>
+            </a:solidFill>
+            <a:round/>
+          </a:ln>
+        </p:spPr>
+        <p:txBody>
+          <a:bodyPr lIns="90000" tIns="45000" rIns="90000" bIns="45000" anchor="t">
+            <a:spAutoFit/>
+          </a:bodyPr>
+          <a:p>
+            <a:pPr/>
+            <a:r>
+              <a:rPr lang="en-US" sz="1800" b="0" u="none" strike="noStrike">
+                <a:solidFill>
+                  <a:srgbClr val="FFFFFF"/>
+                </a:solidFill>
+                <a:effectLst/>
+                <a:uFillTx/>
+                <a:latin typeface="Arial"/>
+              </a:rPr>
+              <a:t>Ask for a decision on the renewal dates today. The rest can wait.</a:t>
+            </a:r>
+            <a:endParaRPr lang="en-US" sz="1800" b="0" u="none" strike="noStrike">
+              <a:solidFill>
+                <a:srgbClr val="FFFFFF"/>
+              </a:solidFill>
+              <a:effectLst/>
+              <a:uFillTx/>
+              <a:latin typeface="Arial"/>
+            </a:endParaRPr>
+          </a:p>
+        </p:txBody>
+      </p:sp>
+    </p:spTree>
+  </p:cSld>
+</p:notes>
 </file>
 
 <file path=ppt/slideLayouts/slideLayout1.xml><?xml version="1.0" encoding="utf-8"?>
@@ -68,7 +911,7 @@
         <p:txBody>
           <a:bodyPr/>
           <a:p>
-            <a:fld id="{DC5BCFC9-14D4-45BD-8D81-2AC0FDF2C1D4}" type="slidenum">
+            <a:fld id="{2E6908C4-D9EB-4EB3-A6C6-87E68D417F5D}" type="slidenum">
               <a:t>&lt;#&gt;</a:t>
             </a:fld>
           </a:p>
@@ -238,7 +1081,7 @@
         <p:txBody>
           <a:bodyPr/>
           <a:p>
-            <a:fld id="{653D022E-372F-4C2C-9F96-2E5AC1B60E46}" type="slidenum">
+            <a:fld id="{BD36EF3E-BE49-47F3-8DDC-0F658B2A4946}" type="slidenum">
               <a:t>&lt;#&gt;</a:t>
             </a:fld>
           </a:p>
@@ -920,7 +1763,7 @@
             <a:pPr indent="0" algn="r">
               <a:buNone/>
             </a:pPr>
-            <a:fld id="{B62E31BA-98A3-47D9-B06C-6F94FC1A4B47}" type="slidenum">
+            <a:fld id="{BA15A757-C0BB-4499-A810-5DC34295AF62}" type="slidenum">
               <a:rPr lang="en-US" sz="1400" b="0" u="none" strike="noStrike">
                 <a:solidFill>
                   <a:srgbClr val="000000"/>
@@ -971,7 +1814,7 @@
       </p:grpSpPr>
       <p:sp>
         <p:nvSpPr>
-          <p:cNvPr id="9" name=""/>
+          <p:cNvPr id="15" name=""/>
           <p:cNvSpPr txBox="1"/>
           <p:nvPr/>
         </p:nvSpPr>
@@ -1026,7 +1869,7 @@
       </p:sp>
       <p:sp>
         <p:nvSpPr>
-          <p:cNvPr id="10" name=""/>
+          <p:cNvPr id="16" name=""/>
           <p:cNvSpPr txBox="1"/>
           <p:nvPr/>
         </p:nvSpPr>
@@ -1155,7 +1998,7 @@
       </p:grpSpPr>
       <p:sp>
         <p:nvSpPr>
-          <p:cNvPr id="11" name=""/>
+          <p:cNvPr id="17" name=""/>
           <p:cNvSpPr txBox="1"/>
           <p:nvPr/>
         </p:nvSpPr>
@@ -1210,7 +2053,7 @@
       </p:sp>
       <p:sp>
         <p:nvSpPr>
-          <p:cNvPr id="12" name=""/>
+          <p:cNvPr id="18" name=""/>
           <p:cNvSpPr txBox="1"/>
           <p:nvPr/>
         </p:nvSpPr>
@@ -1339,7 +2182,7 @@
       </p:grpSpPr>
       <p:sp>
         <p:nvSpPr>
-          <p:cNvPr id="13" name=""/>
+          <p:cNvPr id="19" name=""/>
           <p:cNvSpPr txBox="1"/>
           <p:nvPr/>
         </p:nvSpPr>
@@ -1394,7 +2237,7 @@
       </p:sp>
       <p:sp>
         <p:nvSpPr>
-          <p:cNvPr id="14" name=""/>
+          <p:cNvPr id="20" name=""/>
           <p:cNvSpPr txBox="1"/>
           <p:nvPr/>
         </p:nvSpPr>
@@ -1523,7 +2366,7 @@
       </p:grpSpPr>
       <p:sp>
         <p:nvSpPr>
-          <p:cNvPr id="15" name=""/>
+          <p:cNvPr id="21" name=""/>
           <p:cNvSpPr txBox="1"/>
           <p:nvPr/>
         </p:nvSpPr>
@@ -1578,7 +2421,7 @@
       </p:sp>
       <p:sp>
         <p:nvSpPr>
-          <p:cNvPr id="16" name=""/>
+          <p:cNvPr id="22" name=""/>
           <p:cNvSpPr txBox="1"/>
           <p:nvPr/>
         </p:nvSpPr>
@@ -1707,7 +2550,7 @@
       </p:grpSpPr>
       <p:sp>
         <p:nvSpPr>
-          <p:cNvPr id="17" name=""/>
+          <p:cNvPr id="23" name=""/>
           <p:cNvSpPr txBox="1"/>
           <p:nvPr/>
         </p:nvSpPr>
@@ -1762,7 +2605,7 @@
       </p:sp>
       <p:sp>
         <p:nvSpPr>
-          <p:cNvPr id="18" name=""/>
+          <p:cNvPr id="24" name=""/>
           <p:cNvSpPr txBox="1"/>
           <p:nvPr/>
         </p:nvSpPr>
@@ -1891,7 +2734,7 @@
       </p:grpSpPr>
       <p:sp>
         <p:nvSpPr>
-          <p:cNvPr id="19" name=""/>
+          <p:cNvPr id="25" name=""/>
           <p:cNvSpPr txBox="1"/>
           <p:nvPr/>
         </p:nvSpPr>
@@ -1946,7 +2789,7 @@
       </p:sp>
       <p:sp>
         <p:nvSpPr>
-          <p:cNvPr id="20" name=""/>
+          <p:cNvPr id="26" name=""/>
           <p:cNvSpPr txBox="1"/>
           <p:nvPr/>
         </p:nvSpPr>
@@ -2160,4 +3003,110 @@
     </a:fmtScheme>
   </a:themeElements>
 </a:theme>
+</file>
+
+<file path=ppt/theme/theme2.xml><?xml version="1.0" encoding="utf-8"?>
+<a:theme xmlns:a="http://schemas.openxmlformats.org/drawingml/2006/main" xmlns:r="http://schemas.openxmlformats.org/officeDocument/2006/relationships" name="Office Theme">
+  <a:themeElements>
+    <a:clrScheme name="LibreOffice">
+      <a:dk1>
+        <a:srgbClr val="000000"/>
+      </a:dk1>
+      <a:lt1>
+        <a:srgbClr val="FFFFFF"/>
+      </a:lt1>
+      <a:dk2>
+        <a:srgbClr val="000000"/>
+      </a:dk2>
+      <a:lt2>
+        <a:srgbClr val="FFFFFF"/>
+      </a:lt2>
+      <a:accent1>
+        <a:srgbClr val="18A303"/>
+      </a:accent1>
+      <a:accent2>
+        <a:srgbClr val="0369A3"/>
+      </a:accent2>
+      <a:accent3>
+        <a:srgbClr val="A33E03"/>
+      </a:accent3>
+      <a:accent4>
+        <a:srgbClr val="8E03A3"/>
+      </a:accent4>
+      <a:accent5>
+        <a:srgbClr val="C99C00"/>
+      </a:accent5>
+      <a:accent6>
+        <a:srgbClr val="C9211E"/>
+      </a:accent6>
+      <a:hlink>
+        <a:srgbClr val="0000EE"/>
+      </a:hlink>
+      <a:folHlink>
+        <a:srgbClr val="551A8B"/>
+      </a:folHlink>
+    </a:clrScheme>
+    <a:fontScheme name="Office">
+      <a:majorFont>
+        <a:latin typeface="Arial" pitchFamily="0" charset="1"/>
+        <a:ea typeface="DejaVu Sans" pitchFamily="0" charset="1"/>
+        <a:cs typeface="DejaVu Sans" pitchFamily="0" charset="1"/>
+      </a:majorFont>
+      <a:minorFont>
+        <a:latin typeface="Arial" pitchFamily="0" charset="1"/>
+        <a:ea typeface="DejaVu Sans" pitchFamily="0" charset="1"/>
+        <a:cs typeface="DejaVu Sans" pitchFamily="0" charset="1"/>
+      </a:minorFont>
+    </a:fontScheme>
+    <a:fmtScheme>
+      <a:fillStyleLst>
+        <a:solidFill>
+          <a:schemeClr val="phClr"/>
+        </a:solidFill>
+        <a:solidFill>
+          <a:schemeClr val="phClr"/>
+        </a:solidFill>
+        <a:solidFill>
+          <a:schemeClr val="phClr"/>
+        </a:solidFill>
+      </a:fillStyleLst>
+      <a:lnStyleLst>
+        <a:ln w="6350" cap="flat" cmpd="sng" algn="ctr">
+          <a:prstDash val="solid"/>
+          <a:miter/>
+        </a:ln>
+        <a:ln w="6350" cap="flat" cmpd="sng" algn="ctr">
+          <a:prstDash val="solid"/>
+          <a:miter/>
+        </a:ln>
+        <a:ln w="6350" cap="flat" cmpd="sng" algn="ctr">
+          <a:prstDash val="solid"/>
+          <a:miter/>
+        </a:ln>
+      </a:lnStyleLst>
+      <a:effectStyleLst>
+        <a:effectStyle>
+          <a:effectLst/>
+        </a:effectStyle>
+        <a:effectStyle>
+          <a:effectLst/>
+        </a:effectStyle>
+        <a:effectStyle>
+          <a:effectLst/>
+        </a:effectStyle>
+      </a:effectStyleLst>
+      <a:bgFillStyleLst>
+        <a:solidFill>
+          <a:schemeClr val="phClr"/>
+        </a:solidFill>
+        <a:solidFill>
+          <a:schemeClr val="phClr"/>
+        </a:solidFill>
+        <a:solidFill>
+          <a:schemeClr val="phClr"/>
+        </a:solidFill>
+      </a:bgFillStyleLst>
+    </a:fmtScheme>
+  </a:themeElements>
+</a:theme>
 </file>